--- a/demo_factory/documents/public/S04_Quality_Inspection_Overview.pptx
+++ b/demo_factory/documents/public/S04_Quality_Inspection_Overview.pptx
@@ -6,8 +6,12 @@
   </p:sldMasterIdLst>
   <p:sldIdLst>
     <p:sldId id="256" r:id="rId7"/>
+    <p:sldId id="257" r:id="rId8"/>
+    <p:sldId id="258" r:id="rId9"/>
+    <p:sldId id="259" r:id="rId10"/>
+    <p:sldId id="260" r:id="rId11"/>
   </p:sldIdLst>
-  <p:sldSz cx="9144000" cy="6858000" type="screen4x3"/>
+  <p:sldSz cx="12191695" cy="6858000" type="screen4x3"/>
   <p:notesSz cx="6858000" cy="9144000"/>
   <p:defaultTextStyle>
     <a:defPPr>
@@ -3095,6 +3099,66 @@
             <a:spLocks noGrp="1"/>
           </p:cNvSpPr>
           <p:nvPr>
+            <p:ph type="ctrTitle"/>
+          </p:nvPr>
+        </p:nvSpPr>
+        <p:spPr/>
+        <p:txBody>
+          <a:bodyPr/>
+          <a:lstStyle/>
+          <a:p>
+            <a:r>
+              <a:t>S04 Quality Inspection Overview</a:t>
+            </a:r>
+          </a:p>
+        </p:txBody>
+      </p:sp>
+      <p:sp>
+        <p:nvSpPr>
+          <p:cNvPr id="3" name="Subtitle 2"/>
+          <p:cNvSpPr>
+            <a:spLocks noGrp="1"/>
+          </p:cNvSpPr>
+          <p:nvPr>
+            <p:ph type="subTitle" idx="1"/>
+          </p:nvPr>
+        </p:nvSpPr>
+        <p:spPr/>
+        <p:txBody>
+          <a:bodyPr/>
+          <a:lstStyle/>
+          <a:p>
+            <a:r>
+              <a:t>QI-104 | FACTORY-DEMO-01 | Classification: PUBLIC | Revision 1.1</a:t>
+            </a:r>
+          </a:p>
+        </p:txBody>
+      </p:sp>
+    </p:spTree>
+  </p:cSld>
+  <p:clrMapOvr>
+    <a:masterClrMapping/>
+  </p:clrMapOvr>
+</p:sld>
+</file>
+
+<file path=ppt/slides/slide2.xml><?xml version="1.0" encoding="utf-8"?>
+<p:sld xmlns:a="http://schemas.openxmlformats.org/drawingml/2006/main" xmlns:p="http://schemas.openxmlformats.org/presentationml/2006/main" xmlns:r="http://schemas.openxmlformats.org/officeDocument/2006/relationships">
+  <p:cSld>
+    <p:spTree>
+      <p:nvGrpSpPr>
+        <p:cNvPr id="1" name=""/>
+        <p:cNvGrpSpPr/>
+        <p:nvPr/>
+      </p:nvGrpSpPr>
+      <p:grpSpPr/>
+      <p:sp>
+        <p:nvSpPr>
+          <p:cNvPr id="2" name="Title 1"/>
+          <p:cNvSpPr>
+            <a:spLocks noGrp="1"/>
+          </p:cNvSpPr>
+          <p:nvPr>
             <p:ph type="title"/>
           </p:nvPr>
         </p:nvSpPr>
@@ -3104,7 +3168,7 @@
           <a:lstStyle/>
           <a:p>
             <a:r>
-              <a:t>S04 Quality Inspection Overview</a:t>
+              <a:t>Purpose</a:t>
             </a:r>
           </a:p>
         </p:txBody>
@@ -3125,7 +3189,192 @@
           <a:lstStyle/>
           <a:p>
             <a:r>
-              <a:t>QUALITY-09 inspection decision flow</a:t>
+              <a:t>High-level quality decision overview for FACTORY-DEMO-01.</a:t>
+            </a:r>
+          </a:p>
+        </p:txBody>
+      </p:sp>
+    </p:spTree>
+  </p:cSld>
+  <p:clrMapOvr>
+    <a:masterClrMapping/>
+  </p:clrMapOvr>
+</p:sld>
+</file>
+
+<file path=ppt/slides/slide3.xml><?xml version="1.0" encoding="utf-8"?>
+<p:sld xmlns:a="http://schemas.openxmlformats.org/drawingml/2006/main" xmlns:p="http://schemas.openxmlformats.org/presentationml/2006/main" xmlns:r="http://schemas.openxmlformats.org/officeDocument/2006/relationships">
+  <p:cSld>
+    <p:spTree>
+      <p:nvGrpSpPr>
+        <p:cNvPr id="1" name=""/>
+        <p:cNvGrpSpPr/>
+        <p:nvPr/>
+      </p:nvGrpSpPr>
+      <p:grpSpPr/>
+      <p:sp>
+        <p:nvSpPr>
+          <p:cNvPr id="2" name="Title 1"/>
+          <p:cNvSpPr>
+            <a:spLocks noGrp="1"/>
+          </p:cNvSpPr>
+          <p:nvPr>
+            <p:ph type="title"/>
+          </p:nvPr>
+        </p:nvSpPr>
+        <p:spPr/>
+        <p:txBody>
+          <a:bodyPr/>
+          <a:lstStyle/>
+          <a:p>
+            <a:r>
+              <a:t>Inspection Concept</a:t>
+            </a:r>
+          </a:p>
+        </p:txBody>
+      </p:sp>
+      <p:sp>
+        <p:nvSpPr>
+          <p:cNvPr id="3" name="Content Placeholder 2"/>
+          <p:cNvSpPr>
+            <a:spLocks noGrp="1"/>
+          </p:cNvSpPr>
+          <p:nvPr>
+            <p:ph idx="1"/>
+          </p:nvPr>
+        </p:nvSpPr>
+        <p:spPr/>
+        <p:txBody>
+          <a:bodyPr/>
+          <a:lstStyle/>
+          <a:p>
+            <a:r>
+              <a:t>S04 evaluates assembled product condition against approved inspection logic.</a:t>
+            </a:r>
+          </a:p>
+        </p:txBody>
+      </p:sp>
+    </p:spTree>
+  </p:cSld>
+  <p:clrMapOvr>
+    <a:masterClrMapping/>
+  </p:clrMapOvr>
+</p:sld>
+</file>
+
+<file path=ppt/slides/slide4.xml><?xml version="1.0" encoding="utf-8"?>
+<p:sld xmlns:a="http://schemas.openxmlformats.org/drawingml/2006/main" xmlns:p="http://schemas.openxmlformats.org/presentationml/2006/main" xmlns:r="http://schemas.openxmlformats.org/officeDocument/2006/relationships">
+  <p:cSld>
+    <p:spTree>
+      <p:nvGrpSpPr>
+        <p:cNvPr id="1" name=""/>
+        <p:cNvGrpSpPr/>
+        <p:nvPr/>
+      </p:nvGrpSpPr>
+      <p:grpSpPr/>
+      <p:sp>
+        <p:nvSpPr>
+          <p:cNvPr id="2" name="Title 1"/>
+          <p:cNvSpPr>
+            <a:spLocks noGrp="1"/>
+          </p:cNvSpPr>
+          <p:nvPr>
+            <p:ph type="title"/>
+          </p:nvPr>
+        </p:nvSpPr>
+        <p:spPr/>
+        <p:txBody>
+          <a:bodyPr/>
+          <a:lstStyle/>
+          <a:p>
+            <a:r>
+              <a:t>Quality Flow</a:t>
+            </a:r>
+          </a:p>
+        </p:txBody>
+      </p:sp>
+      <p:sp>
+        <p:nvSpPr>
+          <p:cNvPr id="3" name="Content Placeholder 2"/>
+          <p:cNvSpPr>
+            <a:spLocks noGrp="1"/>
+          </p:cNvSpPr>
+          <p:nvPr>
+            <p:ph idx="1"/>
+          </p:nvPr>
+        </p:nvSpPr>
+        <p:spPr/>
+        <p:txBody>
+          <a:bodyPr/>
+          <a:lstStyle/>
+          <a:p>
+            <a:r>
+              <a:t>Receive product -&gt; inspect -&gt; accept or reject -&gt; record outcome.</a:t>
+            </a:r>
+          </a:p>
+        </p:txBody>
+      </p:sp>
+    </p:spTree>
+  </p:cSld>
+  <p:clrMapOvr>
+    <a:masterClrMapping/>
+  </p:clrMapOvr>
+</p:sld>
+</file>
+
+<file path=ppt/slides/slide5.xml><?xml version="1.0" encoding="utf-8"?>
+<p:sld xmlns:a="http://schemas.openxmlformats.org/drawingml/2006/main" xmlns:p="http://schemas.openxmlformats.org/presentationml/2006/main" xmlns:r="http://schemas.openxmlformats.org/officeDocument/2006/relationships">
+  <p:cSld>
+    <p:spTree>
+      <p:nvGrpSpPr>
+        <p:cNvPr id="1" name=""/>
+        <p:cNvGrpSpPr/>
+        <p:nvPr/>
+      </p:nvGrpSpPr>
+      <p:grpSpPr/>
+      <p:sp>
+        <p:nvSpPr>
+          <p:cNvPr id="2" name="Title 1"/>
+          <p:cNvSpPr>
+            <a:spLocks noGrp="1"/>
+          </p:cNvSpPr>
+          <p:nvPr>
+            <p:ph type="title"/>
+          </p:nvPr>
+        </p:nvSpPr>
+        <p:spPr/>
+        <p:txBody>
+          <a:bodyPr/>
+          <a:lstStyle/>
+          <a:p>
+            <a:r>
+              <a:t>Decision Outcomes</a:t>
+            </a:r>
+          </a:p>
+        </p:txBody>
+      </p:sp>
+      <p:sp>
+        <p:nvSpPr>
+          <p:cNvPr id="3" name="Content Placeholder 2"/>
+          <p:cNvSpPr>
+            <a:spLocks noGrp="1"/>
+          </p:cNvSpPr>
+          <p:nvPr>
+            <p:ph idx="1"/>
+          </p:nvPr>
+        </p:nvSpPr>
+        <p:spPr/>
+        <p:txBody>
+          <a:bodyPr/>
+          <a:lstStyle/>
+          <a:p>
+            <a:r>
+              <a:t>Accepted products continue to S05 Packaging.</a:t>
+            </a:r>
+          </a:p>
+          <a:p>
+            <a:r>
+              <a:t>Rejected products are routed for controlled review.</a:t>
             </a:r>
           </a:p>
         </p:txBody>
